--- a/KAYZEN-Portfel-Pitch-v2.pptx
+++ b/KAYZEN-Portfel-Pitch-v2.pptx
@@ -3227,7 +3227,7 @@
                 </a:solidFill>
                 <a:latin typeface="Calibri"/>
               </a:rPr>
-              <a:t>KAYZEN</a:t>
+              <a:t>FABRIQ</a:t>
             </a:r>
           </a:p>
           <a:p>
@@ -3275,7 +3275,7 @@
                 </a:solidFill>
                 <a:latin typeface="Calibri"/>
               </a:rPr>
-              <a:t>İnvestor təqdimatı · Kayzen · support@kayzen.az · 2026</a:t>
+              <a:t>İnvestor təqdimatı · FABRIQ · support@kayzen.az · 2026</a:t>
             </a:r>
           </a:p>
         </p:txBody>
@@ -3863,6 +3863,102 @@
         <p:spPr>
           <a:xfrm>
             <a:off x="2377440" y="2103120"/>
+            <a:ext cx="9418320" cy="384048"/>
+          </a:xfrm>
+          <a:prstGeom prst="rect">
+            <a:avLst/>
+          </a:prstGeom>
+          <a:solidFill>
+            <a:srgbClr val="FFB300"/>
+          </a:solidFill>
+          <a:ln>
+            <a:noFill/>
+          </a:ln>
+          <a:effectLst/>
+        </p:spPr>
+        <p:style>
+          <a:lnRef idx="1">
+            <a:schemeClr val="accent1"/>
+          </a:lnRef>
+          <a:fillRef idx="3">
+            <a:schemeClr val="accent1"/>
+          </a:fillRef>
+          <a:effectRef idx="2">
+            <a:schemeClr val="accent1"/>
+          </a:effectRef>
+          <a:fontRef idx="minor">
+            <a:schemeClr val="lt1"/>
+          </a:fontRef>
+        </p:style>
+        <p:txBody>
+          <a:bodyPr rtlCol="0" anchor="ctr"/>
+          <a:lstStyle/>
+          <a:p>
+            <a:pPr algn="ctr">
+              <a:spcAft>
+                <a:spcPts val="600"/>
+              </a:spcAft>
+            </a:pPr>
+            <a:r>
+              <a:rPr sz="1000" b="1" i="0">
+                <a:solidFill>
+                  <a:srgbClr val="0D0E10"/>
+                </a:solidFill>
+                <a:latin typeface="Calibri"/>
+              </a:rPr>
+              <a:t>canlı · launch Ay1</a:t>
+            </a:r>
+          </a:p>
+        </p:txBody>
+      </p:sp>
+      <p:sp>
+        <p:nvSpPr>
+          <p:cNvPr id="17" name="TextBox 16"/>
+          <p:cNvSpPr txBox="1"/>
+          <p:nvPr/>
+        </p:nvSpPr>
+        <p:spPr>
+          <a:xfrm>
+            <a:off x="502920" y="2779775"/>
+            <a:ext cx="1828800" cy="457200"/>
+          </a:xfrm>
+          <a:prstGeom prst="rect">
+            <a:avLst/>
+          </a:prstGeom>
+          <a:noFill/>
+        </p:spPr>
+        <p:txBody>
+          <a:bodyPr wrap="square">
+            <a:spAutoFit/>
+          </a:bodyPr>
+          <a:lstStyle/>
+          <a:p>
+            <a:pPr algn="l">
+              <a:spcAft>
+                <a:spcPts val="600"/>
+              </a:spcAft>
+            </a:pPr>
+            <a:r>
+              <a:rPr sz="1300" b="1" i="0">
+                <a:solidFill>
+                  <a:srgbClr val="5C9CFF"/>
+                </a:solidFill>
+                <a:latin typeface="Calibri"/>
+              </a:rPr>
+              <a:t>QUOTEFLOW</a:t>
+            </a:r>
+          </a:p>
+        </p:txBody>
+      </p:sp>
+      <p:sp>
+        <p:nvSpPr>
+          <p:cNvPr id="18" name="Rectangle 17"/>
+          <p:cNvSpPr/>
+          <p:nvPr/>
+        </p:nvSpPr>
+        <p:spPr>
+          <a:xfrm>
+            <a:off x="2769870" y="2761487"/>
             <a:ext cx="392430" cy="384048"/>
           </a:xfrm>
           <a:prstGeom prst="rect">
@@ -3915,20 +4011,20 @@
       </p:sp>
       <p:sp>
         <p:nvSpPr>
-          <p:cNvPr id="17" name="Rectangle 16"/>
+          <p:cNvPr id="19" name="Rectangle 18"/>
           <p:cNvSpPr/>
           <p:nvPr/>
         </p:nvSpPr>
         <p:spPr>
           <a:xfrm>
-            <a:off x="2769870" y="2103120"/>
-            <a:ext cx="9025890" cy="384048"/>
+            <a:off x="3162300" y="2761487"/>
+            <a:ext cx="8633460" cy="384048"/>
           </a:xfrm>
           <a:prstGeom prst="rect">
             <a:avLst/>
           </a:prstGeom>
           <a:solidFill>
-            <a:srgbClr val="FFB300"/>
+            <a:srgbClr val="5C9CFF"/>
           </a:solidFill>
           <a:ln>
             <a:noFill/>
@@ -3965,20 +4061,20 @@
                 </a:solidFill>
                 <a:latin typeface="Calibri"/>
               </a:rPr>
-              <a:t>canlı · launch Ay3</a:t>
-            </a:r>
-          </a:p>
-        </p:txBody>
-      </p:sp>
-      <p:sp>
-        <p:nvSpPr>
-          <p:cNvPr id="18" name="TextBox 17"/>
+              <a:t>canlı · launch Ay5</a:t>
+            </a:r>
+          </a:p>
+        </p:txBody>
+      </p:sp>
+      <p:sp>
+        <p:nvSpPr>
+          <p:cNvPr id="20" name="TextBox 19"/>
           <p:cNvSpPr txBox="1"/>
           <p:nvPr/>
         </p:nvSpPr>
         <p:spPr>
           <a:xfrm>
-            <a:off x="502920" y="2779775"/>
+            <a:off x="502920" y="3438144"/>
             <a:ext cx="1828800" cy="457200"/>
           </a:xfrm>
           <a:prstGeom prst="rect">
@@ -4000,25 +4096,25 @@
             <a:r>
               <a:rPr sz="1300" b="1" i="0">
                 <a:solidFill>
-                  <a:srgbClr val="5C9CFF"/>
-                </a:solidFill>
-                <a:latin typeface="Calibri"/>
-              </a:rPr>
-              <a:t>QUOTEFLOW</a:t>
-            </a:r>
-          </a:p>
-        </p:txBody>
-      </p:sp>
-      <p:sp>
-        <p:nvSpPr>
-          <p:cNvPr id="19" name="Rectangle 18"/>
+                  <a:srgbClr val="57C98A"/>
+                </a:solidFill>
+                <a:latin typeface="Calibri"/>
+              </a:rPr>
+              <a:t>FORMCHECK</a:t>
+            </a:r>
+          </a:p>
+        </p:txBody>
+      </p:sp>
+      <p:sp>
+        <p:nvSpPr>
+          <p:cNvPr id="21" name="Rectangle 20"/>
           <p:cNvSpPr/>
           <p:nvPr/>
         </p:nvSpPr>
         <p:spPr>
           <a:xfrm>
-            <a:off x="3358515" y="2761487"/>
-            <a:ext cx="588645" cy="384048"/>
+            <a:off x="6497955" y="3419856"/>
+            <a:ext cx="392430" cy="384048"/>
           </a:xfrm>
           <a:prstGeom prst="rect">
             <a:avLst/>
@@ -4070,20 +4166,20 @@
       </p:sp>
       <p:sp>
         <p:nvSpPr>
-          <p:cNvPr id="20" name="Rectangle 19"/>
+          <p:cNvPr id="22" name="Rectangle 21"/>
           <p:cNvSpPr/>
           <p:nvPr/>
         </p:nvSpPr>
         <p:spPr>
           <a:xfrm>
-            <a:off x="3947160" y="2761487"/>
-            <a:ext cx="7848600" cy="384048"/>
+            <a:off x="6890385" y="3419856"/>
+            <a:ext cx="4905375" cy="384048"/>
           </a:xfrm>
           <a:prstGeom prst="rect">
             <a:avLst/>
           </a:prstGeom>
           <a:solidFill>
-            <a:srgbClr val="5C9CFF"/>
+            <a:srgbClr val="57C98A"/>
           </a:solidFill>
           <a:ln>
             <a:noFill/>
@@ -4120,20 +4216,20 @@
                 </a:solidFill>
                 <a:latin typeface="Calibri"/>
               </a:rPr>
-              <a:t>canlı · launch Ay9</a:t>
-            </a:r>
-          </a:p>
-        </p:txBody>
-      </p:sp>
-      <p:sp>
-        <p:nvSpPr>
-          <p:cNvPr id="21" name="TextBox 20"/>
+              <a:t>canlı · launch Ay24</a:t>
+            </a:r>
+          </a:p>
+        </p:txBody>
+      </p:sp>
+      <p:sp>
+        <p:nvSpPr>
+          <p:cNvPr id="23" name="TextBox 22"/>
           <p:cNvSpPr txBox="1"/>
           <p:nvPr/>
         </p:nvSpPr>
         <p:spPr>
           <a:xfrm>
-            <a:off x="502920" y="3438144"/>
+            <a:off x="502920" y="4096511"/>
             <a:ext cx="1828800" cy="457200"/>
           </a:xfrm>
           <a:prstGeom prst="rect">
@@ -4155,25 +4251,25 @@
             <a:r>
               <a:rPr sz="1300" b="1" i="0">
                 <a:solidFill>
-                  <a:srgbClr val="57C98A"/>
-                </a:solidFill>
-                <a:latin typeface="Calibri"/>
-              </a:rPr>
-              <a:t>FORMCHECK</a:t>
-            </a:r>
-          </a:p>
-        </p:txBody>
-      </p:sp>
-      <p:sp>
-        <p:nvSpPr>
-          <p:cNvPr id="22" name="Rectangle 21"/>
+                  <a:srgbClr val="B97DF0"/>
+                </a:solidFill>
+                <a:latin typeface="Calibri"/>
+              </a:rPr>
+              <a:t>CONFIGFLOW</a:t>
+            </a:r>
+          </a:p>
+        </p:txBody>
+      </p:sp>
+      <p:sp>
+        <p:nvSpPr>
+          <p:cNvPr id="24" name="Rectangle 23"/>
           <p:cNvSpPr/>
           <p:nvPr/>
         </p:nvSpPr>
         <p:spPr>
           <a:xfrm>
-            <a:off x="4732020" y="3419856"/>
-            <a:ext cx="588645" cy="384048"/>
+            <a:off x="7675245" y="4078224"/>
+            <a:ext cx="392430" cy="384048"/>
           </a:xfrm>
           <a:prstGeom prst="rect">
             <a:avLst/>
@@ -4225,169 +4321,14 @@
       </p:sp>
       <p:sp>
         <p:nvSpPr>
-          <p:cNvPr id="23" name="Rectangle 22"/>
-          <p:cNvSpPr/>
-          <p:nvPr/>
-        </p:nvSpPr>
-        <p:spPr>
-          <a:xfrm>
-            <a:off x="5320665" y="3419856"/>
-            <a:ext cx="6475095" cy="384048"/>
-          </a:xfrm>
-          <a:prstGeom prst="rect">
-            <a:avLst/>
-          </a:prstGeom>
-          <a:solidFill>
-            <a:srgbClr val="57C98A"/>
-          </a:solidFill>
-          <a:ln>
-            <a:noFill/>
-          </a:ln>
-          <a:effectLst/>
-        </p:spPr>
-        <p:style>
-          <a:lnRef idx="1">
-            <a:schemeClr val="accent1"/>
-          </a:lnRef>
-          <a:fillRef idx="3">
-            <a:schemeClr val="accent1"/>
-          </a:fillRef>
-          <a:effectRef idx="2">
-            <a:schemeClr val="accent1"/>
-          </a:effectRef>
-          <a:fontRef idx="minor">
-            <a:schemeClr val="lt1"/>
-          </a:fontRef>
-        </p:style>
-        <p:txBody>
-          <a:bodyPr rtlCol="0" anchor="ctr"/>
-          <a:lstStyle/>
-          <a:p>
-            <a:pPr algn="ctr">
-              <a:spcAft>
-                <a:spcPts val="600"/>
-              </a:spcAft>
-            </a:pPr>
-            <a:r>
-              <a:rPr sz="1000" b="1" i="0">
-                <a:solidFill>
-                  <a:srgbClr val="0D0E10"/>
-                </a:solidFill>
-                <a:latin typeface="Calibri"/>
-              </a:rPr>
-              <a:t>canlı · launch Ay16</a:t>
-            </a:r>
-          </a:p>
-        </p:txBody>
-      </p:sp>
-      <p:sp>
-        <p:nvSpPr>
-          <p:cNvPr id="24" name="TextBox 23"/>
-          <p:cNvSpPr txBox="1"/>
-          <p:nvPr/>
-        </p:nvSpPr>
-        <p:spPr>
-          <a:xfrm>
-            <a:off x="502920" y="4096511"/>
-            <a:ext cx="1828800" cy="457200"/>
-          </a:xfrm>
-          <a:prstGeom prst="rect">
-            <a:avLst/>
-          </a:prstGeom>
-          <a:noFill/>
-        </p:spPr>
-        <p:txBody>
-          <a:bodyPr wrap="square">
-            <a:spAutoFit/>
-          </a:bodyPr>
-          <a:lstStyle/>
-          <a:p>
-            <a:pPr algn="l">
-              <a:spcAft>
-                <a:spcPts val="600"/>
-              </a:spcAft>
-            </a:pPr>
-            <a:r>
-              <a:rPr sz="1300" b="1" i="0">
-                <a:solidFill>
-                  <a:srgbClr val="B97DF0"/>
-                </a:solidFill>
-                <a:latin typeface="Calibri"/>
-              </a:rPr>
-              <a:t>CONFIGFLOW</a:t>
-            </a:r>
-          </a:p>
-        </p:txBody>
-      </p:sp>
-      <p:sp>
-        <p:nvSpPr>
           <p:cNvPr id="25" name="Rectangle 24"/>
           <p:cNvSpPr/>
           <p:nvPr/>
         </p:nvSpPr>
         <p:spPr>
           <a:xfrm>
-            <a:off x="6301740" y="4078224"/>
-            <a:ext cx="588645" cy="384048"/>
-          </a:xfrm>
-          <a:prstGeom prst="rect">
-            <a:avLst/>
-          </a:prstGeom>
-          <a:solidFill>
-            <a:srgbClr val="171A1E"/>
-          </a:solidFill>
-          <a:ln w="9525">
-            <a:solidFill>
-              <a:srgbClr val="FFB300"/>
-            </a:solidFill>
-          </a:ln>
-          <a:effectLst/>
-        </p:spPr>
-        <p:style>
-          <a:lnRef idx="1">
-            <a:schemeClr val="accent1"/>
-          </a:lnRef>
-          <a:fillRef idx="3">
-            <a:schemeClr val="accent1"/>
-          </a:fillRef>
-          <a:effectRef idx="2">
-            <a:schemeClr val="accent1"/>
-          </a:effectRef>
-          <a:fontRef idx="minor">
-            <a:schemeClr val="lt1"/>
-          </a:fontRef>
-        </p:style>
-        <p:txBody>
-          <a:bodyPr rtlCol="0" anchor="ctr"/>
-          <a:lstStyle/>
-          <a:p>
-            <a:pPr algn="ctr">
-              <a:spcAft>
-                <a:spcPts val="600"/>
-              </a:spcAft>
-            </a:pPr>
-            <a:r>
-              <a:rPr sz="1000" b="0" i="0">
-                <a:solidFill>
-                  <a:srgbClr val="FFB300"/>
-                </a:solidFill>
-                <a:latin typeface="Calibri"/>
-              </a:rPr>
-              <a:t>build</a:t>
-            </a:r>
-          </a:p>
-        </p:txBody>
-      </p:sp>
-      <p:sp>
-        <p:nvSpPr>
-          <p:cNvPr id="26" name="Rectangle 25"/>
-          <p:cNvSpPr/>
-          <p:nvPr/>
-        </p:nvSpPr>
-        <p:spPr>
-          <a:xfrm>
-            <a:off x="6890385" y="4078224"/>
-            <a:ext cx="4905375" cy="384048"/>
+            <a:off x="8067675" y="4078224"/>
+            <a:ext cx="3728085" cy="384048"/>
           </a:xfrm>
           <a:prstGeom prst="rect">
             <a:avLst/>
@@ -4430,14 +4371,14 @@
                 </a:solidFill>
                 <a:latin typeface="Calibri"/>
               </a:rPr>
-              <a:t>canlı · launch Ay24</a:t>
-            </a:r>
-          </a:p>
-        </p:txBody>
-      </p:sp>
-      <p:sp>
-        <p:nvSpPr>
-          <p:cNvPr id="27" name="TextBox 26"/>
+              <a:t>canlı · launch Ay30</a:t>
+            </a:r>
+          </a:p>
+        </p:txBody>
+      </p:sp>
+      <p:sp>
+        <p:nvSpPr>
+          <p:cNvPr id="26" name="TextBox 25"/>
           <p:cNvSpPr txBox="1"/>
           <p:nvPr/>
         </p:nvSpPr>
@@ -4469,7 +4410,7 @@
                 </a:solidFill>
                 <a:latin typeface="Calibri"/>
               </a:rPr>
-              <a:t>Ay 3 FEEDRATE launch → komanda QUOTEFLOW-a axır (Ay 9) · Ay 16 → FORMCHECK · Ay 24 → CONFIGFLOW</a:t>
+              <a:t>FAZA 1: Ay 1 FEEDRATE + Ay 5 QUOTEFLOW (2 məhsul, ~$1M seed). FAZA 2 (ÖZ GƏLİRİ ilə): Ay 24 FORMCHECK · Ay 30 CONFIGFLOW</a:t>
             </a:r>
           </a:p>
           <a:p>
@@ -4728,7 +4669,7 @@
                 </a:solidFill>
                 <a:latin typeface="Calibri"/>
               </a:rPr>
-              <a:t>35 nəfər</a:t>
+              <a:t>21 nəfər</a:t>
             </a:r>
           </a:p>
           <a:p>
@@ -6309,7 +6250,7 @@
                 </a:solidFill>
                 <a:latin typeface="Calibri"/>
               </a:rPr>
-              <a:t>$45K</a:t>
+              <a:t>$57K</a:t>
             </a:r>
           </a:p>
           <a:p>
@@ -6384,7 +6325,7 @@
                 </a:solidFill>
                 <a:latin typeface="Calibri"/>
               </a:rPr>
-              <a:t>$316K</a:t>
+              <a:t>$368K</a:t>
             </a:r>
           </a:p>
           <a:p>
@@ -6459,7 +6400,7 @@
                 </a:solidFill>
                 <a:latin typeface="Calibri"/>
               </a:rPr>
-              <a:t>$1,014K</a:t>
+              <a:t>$1,198K</a:t>
             </a:r>
           </a:p>
           <a:p>
@@ -6534,7 +6475,7 @@
                 </a:solidFill>
                 <a:latin typeface="Calibri"/>
               </a:rPr>
-              <a:t>$538K</a:t>
+              <a:t>$687K</a:t>
             </a:r>
           </a:p>
           <a:p>
@@ -6609,7 +6550,7 @@
                 </a:solidFill>
                 <a:latin typeface="Calibri"/>
               </a:rPr>
-              <a:t>$3.79M</a:t>
+              <a:t>$4.42M</a:t>
             </a:r>
           </a:p>
           <a:p>
@@ -6684,7 +6625,7 @@
                 </a:solidFill>
                 <a:latin typeface="Calibri"/>
               </a:rPr>
-              <a:t>$12.17M</a:t>
+              <a:t>$14.37M</a:t>
             </a:r>
           </a:p>
           <a:p>
@@ -6739,7 +6680,7 @@
                 </a:solidFill>
                 <a:latin typeface="Calibri"/>
               </a:rPr>
-              <a:t>İl gəlir: İl1 $90K · İl2 $611K · İl3 $2.32M · İl4 $7.54M   |   Breakeven ≈ Ay 28</a:t>
+              <a:t>İl gəlir: İl1 $154K · İl2 $768K · İl3 $2.68M · İl4 $8.87M   |   Breakeven ≈ Ay 21</a:t>
             </a:r>
           </a:p>
           <a:p>
@@ -6755,7 +6696,7 @@
                 </a:solidFill>
                 <a:latin typeface="Calibri"/>
               </a:rPr>
-              <a:t>İl 4 NET $4.00M · 4 məhsulun hamısı canlı · komanda 35 nəfər</a:t>
+              <a:t>İl 4 NET $5.31M · 4 məhsulun hamısı canlı · komanda 21 nəfər</a:t>
             </a:r>
           </a:p>
         </p:txBody>
@@ -6939,7 +6880,7 @@
                 </a:solidFill>
                 <a:latin typeface="Calibri"/>
               </a:rPr>
-              <a:t>Tələb: $1.80M seed</a:t>
+              <a:t>Tələb: $1.00M seed</a:t>
             </a:r>
           </a:p>
         </p:txBody>
@@ -6998,7 +6939,7 @@
                 </a:solidFill>
                 <a:latin typeface="Calibri"/>
               </a:rPr>
-              <a:t>$1.80M</a:t>
+              <a:t>$1.00M</a:t>
             </a:r>
           </a:p>
           <a:p>
@@ -7073,7 +7014,7 @@
                 </a:solidFill>
                 <a:latin typeface="Calibri"/>
               </a:rPr>
-              <a:t>~1360K</a:t>
+              <a:t>~756K</a:t>
             </a:r>
           </a:p>
           <a:p>
@@ -7148,7 +7089,7 @@
                 </a:solidFill>
                 <a:latin typeface="Calibri"/>
               </a:rPr>
-              <a:t>$12.17M</a:t>
+              <a:t>$14.37M</a:t>
             </a:r>
           </a:p>
           <a:p>
@@ -7219,7 +7160,7 @@
                 </a:solidFill>
                 <a:latin typeface="Calibri"/>
               </a:rPr>
-              <a:t>•  FEEDRATE ilk 2 ay intensiv build, Ay 3 launch — sonra hər məhsul ardıcıl maliyyələşir</a:t>
+              <a:t>•  2 məhsul özünü sübut edir (breakeven ~ay 20) → şirkət öz gəliri ilə məhsul 3-4-ü maliyyələşdirir</a:t>
             </a:r>
           </a:p>
           <a:p>
@@ -7235,7 +7176,7 @@
                 </a:solidFill>
                 <a:latin typeface="Calibri"/>
               </a:rPr>
-              <a:t>Plan: 4 məhsul, $12.17M birləşmiş ARR, İl 4 mənfəətli, ~28 nəfərlə</a:t>
+              <a:t>Plan: 4 məhsul, $14.37M birləşmiş ARR, İl 4 mənfəətli, ~28 nəfərlə</a:t>
             </a:r>
           </a:p>
         </p:txBody>
@@ -7506,7 +7447,7 @@
                 </a:solidFill>
                 <a:latin typeface="Calibri"/>
               </a:rPr>
-              <a:t>•  48 ayın sonunda 35 nəfər · remote-first · Azərbaycan bazlı</a:t>
+              <a:t>•  48 ayın sonunda 21 nəfər · remote-first · Azərbaycan bazlı</a:t>
             </a:r>
           </a:p>
         </p:txBody>
@@ -7651,7 +7592,7 @@
                 </a:solidFill>
                 <a:latin typeface="Calibri"/>
               </a:rPr>
-              <a:t>Bir komanda. Bir nüvə. Dörd bazar.</a:t>
+              <a:t>Bir komanda. Bir nüvə. Mərhələli böyümə.</a:t>
             </a:r>
           </a:p>
           <a:p>
@@ -7683,7 +7624,7 @@
                 </a:solidFill>
                 <a:latin typeface="Calibri"/>
               </a:rPr>
-              <a:t>Kayzen · support@kayzen.az</a:t>
+              <a:t>FABRIQ · support@kayzen.az</a:t>
             </a:r>
           </a:p>
         </p:txBody>
@@ -8544,7 +8485,7 @@
                 </a:solidFill>
                 <a:latin typeface="Calibri"/>
               </a:rPr>
-              <a:t>Nəticə: 4 məhsul, ~28 nəfər, tək seed — 4 ayrı şirkətin kəsri qədər kapitalla</a:t>
+              <a:t>FAZA 1: 2 məhsul, 12 nəfər, ~$1M → breakeven. FAZA 2: digər 2 məhsul ÖZ GƏLİRİ ilə (yeni pul yox)</a:t>
             </a:r>
           </a:p>
         </p:txBody>
@@ -9513,7 +9454,7 @@
                 </a:solidFill>
                 <a:latin typeface="Calibri"/>
               </a:rPr>
-              <a:t>Launch: Ay 3</a:t>
+              <a:t>Launch: Ay 1</a:t>
             </a:r>
           </a:p>
           <a:p>
@@ -9859,7 +9800,7 @@
                 </a:solidFill>
                 <a:latin typeface="Calibri"/>
               </a:rPr>
-              <a:t>Launch: Ay 9</a:t>
+              <a:t>Launch: Ay 5</a:t>
             </a:r>
           </a:p>
           <a:p>
@@ -10189,7 +10130,7 @@
                 </a:solidFill>
                 <a:latin typeface="Calibri"/>
               </a:rPr>
-              <a:t>Launch: Ay 16</a:t>
+              <a:t>Launch: Ay 24</a:t>
             </a:r>
           </a:p>
           <a:p>
@@ -10519,7 +10460,7 @@
                 </a:solidFill>
                 <a:latin typeface="Calibri"/>
               </a:rPr>
-              <a:t>Launch: Ay 24</a:t>
+              <a:t>Launch: Ay 30</a:t>
             </a:r>
           </a:p>
           <a:p>
